--- a/中間発表.pptx
+++ b/中間発表.pptx
@@ -4309,7 +4309,7 @@
                         <a:buNone/>
                       </a:pPr>
                       <a:r>
-                        <a:rPr lang="ja-JP" sz="1700" b="0" i="0" u="none" strike="noStrike">
+                        <a:rPr lang="ja-JP" sz="1700" b="0" i="0" u="none" strike="noStrike" dirty="0">
                           <a:solidFill>
                             <a:srgbClr val="000000"/>
                           </a:solidFill>
@@ -4318,7 +4318,7 @@
                         </a:rPr>
                         <a:t>Illustratorでワイヤーフレーム作成</a:t>
                       </a:r>
-                      <a:endParaRPr lang="ja-JP">
+                      <a:endParaRPr lang="ja-JP" dirty="0">
                         <a:effectLst/>
                       </a:endParaRPr>
                     </a:p>
@@ -4577,7 +4577,7 @@
                         <a:buNone/>
                       </a:pPr>
                       <a:r>
-                        <a:rPr lang="ja-JP" sz="1700" b="0" i="0" u="none" strike="noStrike">
+                        <a:rPr lang="ja-JP" sz="1700" b="0" i="0" u="none" strike="noStrike" dirty="0">
                           <a:solidFill>
                             <a:srgbClr val="000000"/>
                           </a:solidFill>
@@ -4586,7 +4586,7 @@
                         </a:rPr>
                         <a:t>HTML・CSSでWebサイトを制作開始</a:t>
                       </a:r>
-                      <a:endParaRPr lang="ja-JP">
+                      <a:endParaRPr lang="ja-JP" dirty="0">
                         <a:effectLst/>
                       </a:endParaRPr>
                     </a:p>
@@ -4710,7 +4710,7 @@
                         <a:buNone/>
                       </a:pPr>
                       <a:r>
-                        <a:rPr lang="ja-JP" sz="1700" b="0" i="0" u="none" strike="noStrike">
+                        <a:rPr lang="ja-JP" sz="1700" b="0" i="0" u="none" strike="noStrike" dirty="0">
                           <a:solidFill>
                             <a:srgbClr val="000000"/>
                           </a:solidFill>
@@ -4719,7 +4719,7 @@
                         </a:rPr>
                         <a:t>デザイン調整、コーディング</a:t>
                       </a:r>
-                      <a:endParaRPr lang="ja-JP">
+                      <a:endParaRPr lang="ja-JP" dirty="0">
                         <a:effectLst/>
                       </a:endParaRPr>
                     </a:p>
@@ -4843,7 +4843,7 @@
                         <a:buNone/>
                       </a:pPr>
                       <a:r>
-                        <a:rPr lang="ja-JP" sz="1700" b="0" i="0" u="none" strike="noStrike">
+                        <a:rPr lang="ja-JP" sz="1700" b="0" i="0" u="none" strike="noStrike" dirty="0">
                           <a:solidFill>
                             <a:srgbClr val="000000"/>
                           </a:solidFill>
@@ -4853,7 +4853,7 @@
                         <a:t>Webサイトの修正・動作確認、</a:t>
                       </a:r>
                       <a:r>
-                        <a:rPr lang="ja-JP" sz="1700" b="1" i="0" u="none" strike="noStrike">
+                        <a:rPr lang="ja-JP" sz="1700" b="1" i="0" u="none" strike="noStrike" dirty="0">
                           <a:solidFill>
                             <a:srgbClr val="000000"/>
                           </a:solidFill>
@@ -4862,7 +4862,7 @@
                         </a:rPr>
                         <a:t>ポスターのデザイン制作</a:t>
                       </a:r>
-                      <a:endParaRPr lang="ja-JP">
+                      <a:endParaRPr lang="ja-JP" dirty="0">
                         <a:effectLst/>
                       </a:endParaRPr>
                     </a:p>
@@ -6428,6 +6428,55 @@
             <a:endParaRPr lang="ja-JP" altLang="ja-JP" sz="2400" dirty="0">
               <a:latin typeface="+mn-ea"/>
             </a:endParaRPr>
+          </a:p>
+        </p:txBody>
+      </p:sp>
+      <p:sp>
+        <p:nvSpPr>
+          <p:cNvPr id="4" name="矢印: 右 3">
+            <a:extLst>
+              <a:ext uri="{FF2B5EF4-FFF2-40B4-BE49-F238E27FC236}">
+                <a16:creationId xmlns:a16="http://schemas.microsoft.com/office/drawing/2014/main" id="{55077150-AB83-5A4F-81AA-904DE38CCC19}"/>
+              </a:ext>
+            </a:extLst>
+          </p:cNvPr>
+          <p:cNvSpPr/>
+          <p:nvPr/>
+        </p:nvSpPr>
+        <p:spPr>
+          <a:xfrm>
+            <a:off x="5609772" y="5256521"/>
+            <a:ext cx="1364343" cy="830997"/>
+          </a:xfrm>
+          <a:prstGeom prst="rightArrow">
+            <a:avLst/>
+          </a:prstGeom>
+          <a:solidFill>
+            <a:srgbClr val="C8B6A6"/>
+          </a:solidFill>
+        </p:spPr>
+        <p:style>
+          <a:lnRef idx="2">
+            <a:schemeClr val="accent1">
+              <a:shade val="15000"/>
+            </a:schemeClr>
+          </a:lnRef>
+          <a:fillRef idx="1">
+            <a:schemeClr val="accent1"/>
+          </a:fillRef>
+          <a:effectRef idx="0">
+            <a:schemeClr val="accent1"/>
+          </a:effectRef>
+          <a:fontRef idx="minor">
+            <a:schemeClr val="lt1"/>
+          </a:fontRef>
+        </p:style>
+        <p:txBody>
+          <a:bodyPr rtlCol="0" anchor="ctr"/>
+          <a:lstStyle/>
+          <a:p>
+            <a:pPr algn="ctr"/>
+            <a:endParaRPr kumimoji="1" lang="ja-JP" altLang="en-US"/>
           </a:p>
         </p:txBody>
       </p:sp>

--- a/中間発表.pptx
+++ b/中間発表.pptx
@@ -5102,7 +5102,7 @@
         </p:blipFill>
         <p:spPr>
           <a:xfrm>
-            <a:off x="6249886" y="362195"/>
+            <a:off x="6238036" y="1721890"/>
             <a:ext cx="5300383" cy="2034184"/>
           </a:xfrm>
           <a:prstGeom prst="rect">
@@ -5132,7 +5132,7 @@
         </p:blipFill>
         <p:spPr>
           <a:xfrm>
-            <a:off x="6259922" y="2479125"/>
+            <a:off x="6237446" y="4133467"/>
             <a:ext cx="5300973" cy="2067569"/>
           </a:xfrm>
           <a:prstGeom prst="rect">
@@ -5158,7 +5158,7 @@
         </p:nvSpPr>
         <p:spPr>
           <a:xfrm>
-            <a:off x="6444465" y="1068568"/>
+            <a:off x="6343931" y="2317801"/>
             <a:ext cx="4330941" cy="623262"/>
           </a:xfrm>
         </p:spPr>
@@ -5203,7 +5203,7 @@
         </p:nvSpPr>
         <p:spPr>
           <a:xfrm>
-            <a:off x="6444465" y="3140389"/>
+            <a:off x="6378546" y="4880925"/>
             <a:ext cx="4048395" cy="623263"/>
           </a:xfrm>
           <a:prstGeom prst="rect">
@@ -5261,7 +5261,7 @@
         </p:nvSpPr>
         <p:spPr>
           <a:xfrm>
-            <a:off x="6259922" y="330515"/>
+            <a:off x="6237446" y="1721890"/>
             <a:ext cx="3740621" cy="820057"/>
           </a:xfrm>
           <a:prstGeom prst="rect">
@@ -5328,7 +5328,7 @@
         </p:nvSpPr>
         <p:spPr>
           <a:xfrm>
-            <a:off x="6259922" y="2396379"/>
+            <a:off x="6343931" y="4190991"/>
             <a:ext cx="3740621" cy="820057"/>
           </a:xfrm>
           <a:prstGeom prst="rect">
@@ -5491,7 +5491,7 @@
         </p:nvSpPr>
         <p:spPr>
           <a:xfrm>
-            <a:off x="6108614" y="1690748"/>
+            <a:off x="6096000" y="2881122"/>
             <a:ext cx="4330941" cy="623262"/>
           </a:xfrm>
           <a:prstGeom prst="rect">
@@ -5570,7 +5570,7 @@
         </p:nvSpPr>
         <p:spPr>
           <a:xfrm>
-            <a:off x="6159659" y="3805025"/>
+            <a:off x="6096000" y="5510009"/>
             <a:ext cx="4330941" cy="623262"/>
           </a:xfrm>
           <a:prstGeom prst="rect">
@@ -5734,161 +5734,6 @@
             <a:endParaRPr lang="ja-JP" altLang="ja-JP" sz="4000" dirty="0">
               <a:effectLst/>
             </a:endParaRPr>
-          </a:p>
-        </p:txBody>
-      </p:sp>
-      <p:pic>
-        <p:nvPicPr>
-          <p:cNvPr id="24" name="図 23" descr="image.png">
-            <a:extLst>
-              <a:ext uri="{FF2B5EF4-FFF2-40B4-BE49-F238E27FC236}">
-                <a16:creationId xmlns:a16="http://schemas.microsoft.com/office/drawing/2014/main" id="{CE50EB4F-1D81-78B9-0384-8700E320A2C2}"/>
-              </a:ext>
-            </a:extLst>
-          </p:cNvPr>
-          <p:cNvPicPr>
-            <a:picLocks noChangeAspect="1"/>
-          </p:cNvPicPr>
-          <p:nvPr/>
-        </p:nvPicPr>
-        <p:blipFill>
-          <a:blip r:embed="rId2"/>
-          <a:stretch>
-            <a:fillRect/>
-          </a:stretch>
-        </p:blipFill>
-        <p:spPr>
-          <a:xfrm>
-            <a:off x="6249885" y="4625082"/>
-            <a:ext cx="5300383" cy="2034184"/>
-          </a:xfrm>
-          <a:prstGeom prst="rect">
-            <a:avLst/>
-          </a:prstGeom>
-        </p:spPr>
-      </p:pic>
-      <p:sp>
-        <p:nvSpPr>
-          <p:cNvPr id="26" name="タイトル 1">
-            <a:extLst>
-              <a:ext uri="{FF2B5EF4-FFF2-40B4-BE49-F238E27FC236}">
-                <a16:creationId xmlns:a16="http://schemas.microsoft.com/office/drawing/2014/main" id="{45C32F25-670A-C6E6-03C3-693024B6E5F6}"/>
-              </a:ext>
-            </a:extLst>
-          </p:cNvPr>
-          <p:cNvSpPr txBox="1">
-            <a:spLocks/>
-          </p:cNvSpPr>
-          <p:nvPr/>
-        </p:nvSpPr>
-        <p:spPr>
-          <a:xfrm>
-            <a:off x="6259922" y="4517270"/>
-            <a:ext cx="3740621" cy="820057"/>
-          </a:xfrm>
-          <a:prstGeom prst="rect">
-            <a:avLst/>
-          </a:prstGeom>
-        </p:spPr>
-        <p:txBody>
-          <a:bodyPr vert="horz" lIns="91440" tIns="45720" rIns="91440" bIns="45720" rtlCol="0" anchor="ctr">
-            <a:noAutofit/>
-          </a:bodyPr>
-          <a:lstStyle>
-            <a:lvl1pPr algn="l" defTabSz="914400" rtl="0" eaLnBrk="1" latinLnBrk="0" hangingPunct="1">
-              <a:lnSpc>
-                <a:spcPct val="90000"/>
-              </a:lnSpc>
-              <a:spcBef>
-                <a:spcPct val="0"/>
-              </a:spcBef>
-              <a:buNone/>
-              <a:defRPr kumimoji="1" sz="4400" kern="1200">
-                <a:solidFill>
-                  <a:schemeClr val="tx1"/>
-                </a:solidFill>
-                <a:latin typeface="+mj-lt"/>
-                <a:ea typeface="+mj-ea"/>
-                <a:cs typeface="+mj-cs"/>
-              </a:defRPr>
-            </a:lvl1pPr>
-          </a:lstStyle>
-          <a:p>
-            <a:r>
-              <a:rPr lang="en-US" altLang="ja-JP" sz="4000" dirty="0">
-                <a:solidFill>
-                  <a:schemeClr val="bg1"/>
-                </a:solidFill>
-                <a:latin typeface="ADLaM Display" panose="02010000000000000000" pitchFamily="2" charset="0"/>
-                <a:cs typeface="ADLaM Display" panose="02010000000000000000" pitchFamily="2" charset="0"/>
-              </a:rPr>
-              <a:t>Topic.03</a:t>
-            </a:r>
-            <a:endParaRPr lang="ja-JP" altLang="en-US" sz="4000" dirty="0">
-              <a:solidFill>
-                <a:schemeClr val="bg1"/>
-              </a:solidFill>
-              <a:latin typeface="ADLaM Display" panose="02010000000000000000" pitchFamily="2" charset="0"/>
-              <a:cs typeface="ADLaM Display" panose="02010000000000000000" pitchFamily="2" charset="0"/>
-            </a:endParaRPr>
-          </a:p>
-        </p:txBody>
-      </p:sp>
-      <p:sp>
-        <p:nvSpPr>
-          <p:cNvPr id="27" name="タイトル 1">
-            <a:extLst>
-              <a:ext uri="{FF2B5EF4-FFF2-40B4-BE49-F238E27FC236}">
-                <a16:creationId xmlns:a16="http://schemas.microsoft.com/office/drawing/2014/main" id="{2658F46C-C855-DC43-AC84-237393B4983A}"/>
-              </a:ext>
-            </a:extLst>
-          </p:cNvPr>
-          <p:cNvSpPr txBox="1">
-            <a:spLocks/>
-          </p:cNvSpPr>
-          <p:nvPr/>
-        </p:nvSpPr>
-        <p:spPr>
-          <a:xfrm>
-            <a:off x="6378846" y="5151710"/>
-            <a:ext cx="4330941" cy="623262"/>
-          </a:xfrm>
-          <a:prstGeom prst="rect">
-            <a:avLst/>
-          </a:prstGeom>
-        </p:spPr>
-        <p:txBody>
-          <a:bodyPr vert="horz" lIns="91440" tIns="45720" rIns="91440" bIns="45720" rtlCol="0" anchor="ctr">
-            <a:normAutofit fontScale="97500"/>
-          </a:bodyPr>
-          <a:lstStyle>
-            <a:lvl1pPr algn="l" defTabSz="914400" rtl="0" eaLnBrk="1" latinLnBrk="0" hangingPunct="1">
-              <a:lnSpc>
-                <a:spcPct val="90000"/>
-              </a:lnSpc>
-              <a:spcBef>
-                <a:spcPct val="0"/>
-              </a:spcBef>
-              <a:buNone/>
-              <a:defRPr kumimoji="1" sz="4400" kern="1200">
-                <a:solidFill>
-                  <a:schemeClr val="tx1"/>
-                </a:solidFill>
-                <a:latin typeface="+mj-lt"/>
-                <a:ea typeface="+mj-ea"/>
-                <a:cs typeface="+mj-cs"/>
-              </a:defRPr>
-            </a:lvl1pPr>
-          </a:lstStyle>
-          <a:p>
-            <a:r>
-              <a:rPr lang="ja-JP" altLang="en-US" sz="2800" dirty="0">
-                <a:solidFill>
-                  <a:schemeClr val="bg1"/>
-                </a:solidFill>
-              </a:rPr>
-              <a:t>チラシ課題</a:t>
-            </a:r>
           </a:p>
         </p:txBody>
       </p:sp>
